--- a/analysis/submitted_analyses/aDDM_predictions.pptx
+++ b/analysis/submitted_analyses/aDDM_predictions.pptx
@@ -2,12 +2,12 @@
 <file path=ppt/presentation.xml><?xml version="1.0" encoding="utf-8"?>
 <p:presentation xmlns:a="http://schemas.openxmlformats.org/drawingml/2006/main" xmlns:r="http://schemas.openxmlformats.org/officeDocument/2006/relationships" xmlns:p="http://schemas.openxmlformats.org/presentationml/2006/main" saveSubsetFonts="1" autoCompressPictures="0">
   <p:sldMasterIdLst>
-    <p:sldMasterId id="2147483768" r:id="rId1"/>
+    <p:sldMasterId id="2147483780" r:id="rId1"/>
   </p:sldMasterIdLst>
   <p:sldIdLst>
     <p:sldId id="257" r:id="rId2"/>
   </p:sldIdLst>
-  <p:sldSz cx="8229600" cy="12179300"/>
+  <p:sldSz cx="8229600" cy="10150475"/>
   <p:notesSz cx="6858000" cy="9144000"/>
   <p:defaultTextStyle>
     <a:defPPr>
@@ -141,8 +141,8 @@
         </p:nvSpPr>
         <p:spPr>
           <a:xfrm>
-            <a:off x="617220" y="1993233"/>
-            <a:ext cx="6995160" cy="4240201"/>
+            <a:off x="617220" y="1661201"/>
+            <a:ext cx="6995160" cy="3533869"/>
           </a:xfrm>
         </p:spPr>
         <p:txBody>
@@ -173,8 +173,8 @@
         </p:nvSpPr>
         <p:spPr>
           <a:xfrm>
-            <a:off x="1028700" y="6396953"/>
-            <a:ext cx="6172200" cy="2940511"/>
+            <a:off x="1028700" y="5331350"/>
+            <a:ext cx="6172200" cy="2450681"/>
           </a:xfrm>
         </p:spPr>
         <p:txBody>
@@ -243,7 +243,7 @@
           <a:p>
             <a:fld id="{56A34C3C-A36F-F249-809C-A0018531D0A6}" type="datetimeFigureOut">
               <a:rPr lang="en-US" smtClean="0"/>
-              <a:t>6/27/24</a:t>
+              <a:t>7/3/24</a:t>
             </a:fld>
             <a:endParaRPr lang="en-US"/>
           </a:p>
@@ -294,7 +294,7 @@
     </p:spTree>
     <p:extLst>
       <p:ext uri="{BB962C8B-B14F-4D97-AF65-F5344CB8AC3E}">
-        <p14:creationId xmlns:p14="http://schemas.microsoft.com/office/powerpoint/2010/main" val="3364765616"/>
+        <p14:creationId xmlns:p14="http://schemas.microsoft.com/office/powerpoint/2010/main" val="3095201214"/>
       </p:ext>
     </p:extLst>
   </p:cSld>
@@ -413,7 +413,7 @@
           <a:p>
             <a:fld id="{56A34C3C-A36F-F249-809C-A0018531D0A6}" type="datetimeFigureOut">
               <a:rPr lang="en-US" smtClean="0"/>
-              <a:t>6/27/24</a:t>
+              <a:t>7/3/24</a:t>
             </a:fld>
             <a:endParaRPr lang="en-US"/>
           </a:p>
@@ -464,7 +464,7 @@
     </p:spTree>
     <p:extLst>
       <p:ext uri="{BB962C8B-B14F-4D97-AF65-F5344CB8AC3E}">
-        <p14:creationId xmlns:p14="http://schemas.microsoft.com/office/powerpoint/2010/main" val="3156613379"/>
+        <p14:creationId xmlns:p14="http://schemas.microsoft.com/office/powerpoint/2010/main" val="1319597779"/>
       </p:ext>
     </p:extLst>
   </p:cSld>
@@ -503,8 +503,8 @@
         </p:nvSpPr>
         <p:spPr>
           <a:xfrm>
-            <a:off x="5889308" y="648435"/>
-            <a:ext cx="1774508" cy="10321394"/>
+            <a:off x="5889308" y="540419"/>
+            <a:ext cx="1774508" cy="8602058"/>
           </a:xfrm>
         </p:spPr>
         <p:txBody>
@@ -531,8 +531,8 @@
         </p:nvSpPr>
         <p:spPr>
           <a:xfrm>
-            <a:off x="565785" y="648435"/>
-            <a:ext cx="5220653" cy="10321394"/>
+            <a:off x="565785" y="540419"/>
+            <a:ext cx="5220653" cy="8602058"/>
           </a:xfrm>
         </p:spPr>
         <p:txBody>
@@ -593,7 +593,7 @@
           <a:p>
             <a:fld id="{56A34C3C-A36F-F249-809C-A0018531D0A6}" type="datetimeFigureOut">
               <a:rPr lang="en-US" smtClean="0"/>
-              <a:t>6/27/24</a:t>
+              <a:t>7/3/24</a:t>
             </a:fld>
             <a:endParaRPr lang="en-US"/>
           </a:p>
@@ -644,7 +644,7 @@
     </p:spTree>
     <p:extLst>
       <p:ext uri="{BB962C8B-B14F-4D97-AF65-F5344CB8AC3E}">
-        <p14:creationId xmlns:p14="http://schemas.microsoft.com/office/powerpoint/2010/main" val="802392622"/>
+        <p14:creationId xmlns:p14="http://schemas.microsoft.com/office/powerpoint/2010/main" val="3659150419"/>
       </p:ext>
     </p:extLst>
   </p:cSld>
@@ -763,7 +763,7 @@
           <a:p>
             <a:fld id="{56A34C3C-A36F-F249-809C-A0018531D0A6}" type="datetimeFigureOut">
               <a:rPr lang="en-US" smtClean="0"/>
-              <a:t>6/27/24</a:t>
+              <a:t>7/3/24</a:t>
             </a:fld>
             <a:endParaRPr lang="en-US"/>
           </a:p>
@@ -814,7 +814,7 @@
     </p:spTree>
     <p:extLst>
       <p:ext uri="{BB962C8B-B14F-4D97-AF65-F5344CB8AC3E}">
-        <p14:creationId xmlns:p14="http://schemas.microsoft.com/office/powerpoint/2010/main" val="2785877040"/>
+        <p14:creationId xmlns:p14="http://schemas.microsoft.com/office/powerpoint/2010/main" val="1472095722"/>
       </p:ext>
     </p:extLst>
   </p:cSld>
@@ -853,8 +853,8 @@
         </p:nvSpPr>
         <p:spPr>
           <a:xfrm>
-            <a:off x="561499" y="3036371"/>
-            <a:ext cx="7098030" cy="5066250"/>
+            <a:off x="561499" y="2530573"/>
+            <a:ext cx="7098030" cy="4222315"/>
           </a:xfrm>
         </p:spPr>
         <p:txBody>
@@ -885,8 +885,8 @@
         </p:nvSpPr>
         <p:spPr>
           <a:xfrm>
-            <a:off x="561499" y="8150549"/>
-            <a:ext cx="7098030" cy="2664221"/>
+            <a:off x="561499" y="6792832"/>
+            <a:ext cx="7098030" cy="2220416"/>
           </a:xfrm>
         </p:spPr>
         <p:txBody>
@@ -1007,7 +1007,7 @@
           <a:p>
             <a:fld id="{56A34C3C-A36F-F249-809C-A0018531D0A6}" type="datetimeFigureOut">
               <a:rPr lang="en-US" smtClean="0"/>
-              <a:t>6/27/24</a:t>
+              <a:t>7/3/24</a:t>
             </a:fld>
             <a:endParaRPr lang="en-US"/>
           </a:p>
@@ -1058,7 +1058,7 @@
     </p:spTree>
     <p:extLst>
       <p:ext uri="{BB962C8B-B14F-4D97-AF65-F5344CB8AC3E}">
-        <p14:creationId xmlns:p14="http://schemas.microsoft.com/office/powerpoint/2010/main" val="714618931"/>
+        <p14:creationId xmlns:p14="http://schemas.microsoft.com/office/powerpoint/2010/main" val="3186780088"/>
       </p:ext>
     </p:extLst>
   </p:cSld>
@@ -1120,8 +1120,8 @@
         </p:nvSpPr>
         <p:spPr>
           <a:xfrm>
-            <a:off x="565785" y="3242175"/>
-            <a:ext cx="3497580" cy="7727654"/>
+            <a:off x="565785" y="2702094"/>
+            <a:ext cx="3497580" cy="6440383"/>
           </a:xfrm>
         </p:spPr>
         <p:txBody>
@@ -1177,8 +1177,8 @@
         </p:nvSpPr>
         <p:spPr>
           <a:xfrm>
-            <a:off x="4166235" y="3242175"/>
-            <a:ext cx="3497580" cy="7727654"/>
+            <a:off x="4166235" y="2702094"/>
+            <a:ext cx="3497580" cy="6440383"/>
           </a:xfrm>
         </p:spPr>
         <p:txBody>
@@ -1239,7 +1239,7 @@
           <a:p>
             <a:fld id="{56A34C3C-A36F-F249-809C-A0018531D0A6}" type="datetimeFigureOut">
               <a:rPr lang="en-US" smtClean="0"/>
-              <a:t>6/27/24</a:t>
+              <a:t>7/3/24</a:t>
             </a:fld>
             <a:endParaRPr lang="en-US"/>
           </a:p>
@@ -1290,7 +1290,7 @@
     </p:spTree>
     <p:extLst>
       <p:ext uri="{BB962C8B-B14F-4D97-AF65-F5344CB8AC3E}">
-        <p14:creationId xmlns:p14="http://schemas.microsoft.com/office/powerpoint/2010/main" val="473397434"/>
+        <p14:creationId xmlns:p14="http://schemas.microsoft.com/office/powerpoint/2010/main" val="4268741559"/>
       </p:ext>
     </p:extLst>
   </p:cSld>
@@ -1329,8 +1329,8 @@
         </p:nvSpPr>
         <p:spPr>
           <a:xfrm>
-            <a:off x="566857" y="648437"/>
-            <a:ext cx="7098030" cy="2354102"/>
+            <a:off x="566857" y="540421"/>
+            <a:ext cx="7098030" cy="1961956"/>
           </a:xfrm>
         </p:spPr>
         <p:txBody>
@@ -1357,8 +1357,8 @@
         </p:nvSpPr>
         <p:spPr>
           <a:xfrm>
-            <a:off x="566858" y="2985621"/>
-            <a:ext cx="3481506" cy="1463207"/>
+            <a:off x="566858" y="2488277"/>
+            <a:ext cx="3481506" cy="1219466"/>
           </a:xfrm>
         </p:spPr>
         <p:txBody>
@@ -1422,8 +1422,8 @@
         </p:nvSpPr>
         <p:spPr>
           <a:xfrm>
-            <a:off x="566858" y="4448828"/>
-            <a:ext cx="3481506" cy="6543555"/>
+            <a:off x="566858" y="3707743"/>
+            <a:ext cx="3481506" cy="5453531"/>
           </a:xfrm>
         </p:spPr>
         <p:txBody>
@@ -1479,8 +1479,8 @@
         </p:nvSpPr>
         <p:spPr>
           <a:xfrm>
-            <a:off x="4166235" y="2985621"/>
-            <a:ext cx="3498652" cy="1463207"/>
+            <a:off x="4166235" y="2488277"/>
+            <a:ext cx="3498652" cy="1219466"/>
           </a:xfrm>
         </p:spPr>
         <p:txBody>
@@ -1544,8 +1544,8 @@
         </p:nvSpPr>
         <p:spPr>
           <a:xfrm>
-            <a:off x="4166235" y="4448828"/>
-            <a:ext cx="3498652" cy="6543555"/>
+            <a:off x="4166235" y="3707743"/>
+            <a:ext cx="3498652" cy="5453531"/>
           </a:xfrm>
         </p:spPr>
         <p:txBody>
@@ -1606,7 +1606,7 @@
           <a:p>
             <a:fld id="{56A34C3C-A36F-F249-809C-A0018531D0A6}" type="datetimeFigureOut">
               <a:rPr lang="en-US" smtClean="0"/>
-              <a:t>6/27/24</a:t>
+              <a:t>7/3/24</a:t>
             </a:fld>
             <a:endParaRPr lang="en-US"/>
           </a:p>
@@ -1657,7 +1657,7 @@
     </p:spTree>
     <p:extLst>
       <p:ext uri="{BB962C8B-B14F-4D97-AF65-F5344CB8AC3E}">
-        <p14:creationId xmlns:p14="http://schemas.microsoft.com/office/powerpoint/2010/main" val="2850280122"/>
+        <p14:creationId xmlns:p14="http://schemas.microsoft.com/office/powerpoint/2010/main" val="2309809361"/>
       </p:ext>
     </p:extLst>
   </p:cSld>
@@ -1724,7 +1724,7 @@
           <a:p>
             <a:fld id="{56A34C3C-A36F-F249-809C-A0018531D0A6}" type="datetimeFigureOut">
               <a:rPr lang="en-US" smtClean="0"/>
-              <a:t>6/27/24</a:t>
+              <a:t>7/3/24</a:t>
             </a:fld>
             <a:endParaRPr lang="en-US"/>
           </a:p>
@@ -1775,7 +1775,7 @@
     </p:spTree>
     <p:extLst>
       <p:ext uri="{BB962C8B-B14F-4D97-AF65-F5344CB8AC3E}">
-        <p14:creationId xmlns:p14="http://schemas.microsoft.com/office/powerpoint/2010/main" val="1077369342"/>
+        <p14:creationId xmlns:p14="http://schemas.microsoft.com/office/powerpoint/2010/main" val="3074233656"/>
       </p:ext>
     </p:extLst>
   </p:cSld>
@@ -1819,7 +1819,7 @@
           <a:p>
             <a:fld id="{56A34C3C-A36F-F249-809C-A0018531D0A6}" type="datetimeFigureOut">
               <a:rPr lang="en-US" smtClean="0"/>
-              <a:t>6/27/24</a:t>
+              <a:t>7/3/24</a:t>
             </a:fld>
             <a:endParaRPr lang="en-US"/>
           </a:p>
@@ -1870,7 +1870,7 @@
     </p:spTree>
     <p:extLst>
       <p:ext uri="{BB962C8B-B14F-4D97-AF65-F5344CB8AC3E}">
-        <p14:creationId xmlns:p14="http://schemas.microsoft.com/office/powerpoint/2010/main" val="2918325901"/>
+        <p14:creationId xmlns:p14="http://schemas.microsoft.com/office/powerpoint/2010/main" val="3641279273"/>
       </p:ext>
     </p:extLst>
   </p:cSld>
@@ -1909,8 +1909,8 @@
         </p:nvSpPr>
         <p:spPr>
           <a:xfrm>
-            <a:off x="566857" y="811953"/>
-            <a:ext cx="2654260" cy="2841837"/>
+            <a:off x="566857" y="676698"/>
+            <a:ext cx="2654260" cy="2368444"/>
           </a:xfrm>
         </p:spPr>
         <p:txBody>
@@ -1941,8 +1941,8 @@
         </p:nvSpPr>
         <p:spPr>
           <a:xfrm>
-            <a:off x="3498652" y="1753596"/>
-            <a:ext cx="4166235" cy="8655197"/>
+            <a:off x="3498652" y="1461483"/>
+            <a:ext cx="4166235" cy="7213416"/>
           </a:xfrm>
         </p:spPr>
         <p:txBody>
@@ -2026,8 +2026,8 @@
         </p:nvSpPr>
         <p:spPr>
           <a:xfrm>
-            <a:off x="566857" y="3653790"/>
-            <a:ext cx="2654260" cy="6769098"/>
+            <a:off x="566857" y="3045143"/>
+            <a:ext cx="2654260" cy="5641503"/>
           </a:xfrm>
         </p:spPr>
         <p:txBody>
@@ -2096,7 +2096,7 @@
           <a:p>
             <a:fld id="{56A34C3C-A36F-F249-809C-A0018531D0A6}" type="datetimeFigureOut">
               <a:rPr lang="en-US" smtClean="0"/>
-              <a:t>6/27/24</a:t>
+              <a:t>7/3/24</a:t>
             </a:fld>
             <a:endParaRPr lang="en-US"/>
           </a:p>
@@ -2147,7 +2147,7 @@
     </p:spTree>
     <p:extLst>
       <p:ext uri="{BB962C8B-B14F-4D97-AF65-F5344CB8AC3E}">
-        <p14:creationId xmlns:p14="http://schemas.microsoft.com/office/powerpoint/2010/main" val="2715722409"/>
+        <p14:creationId xmlns:p14="http://schemas.microsoft.com/office/powerpoint/2010/main" val="45594263"/>
       </p:ext>
     </p:extLst>
   </p:cSld>
@@ -2186,8 +2186,8 @@
         </p:nvSpPr>
         <p:spPr>
           <a:xfrm>
-            <a:off x="566857" y="811953"/>
-            <a:ext cx="2654260" cy="2841837"/>
+            <a:off x="566857" y="676698"/>
+            <a:ext cx="2654260" cy="2368444"/>
           </a:xfrm>
         </p:spPr>
         <p:txBody>
@@ -2218,8 +2218,8 @@
         </p:nvSpPr>
         <p:spPr>
           <a:xfrm>
-            <a:off x="3498652" y="1753596"/>
-            <a:ext cx="4166235" cy="8655197"/>
+            <a:off x="3498652" y="1461483"/>
+            <a:ext cx="4166235" cy="7213416"/>
           </a:xfrm>
         </p:spPr>
         <p:txBody>
@@ -2283,8 +2283,8 @@
         </p:nvSpPr>
         <p:spPr>
           <a:xfrm>
-            <a:off x="566857" y="3653790"/>
-            <a:ext cx="2654260" cy="6769098"/>
+            <a:off x="566857" y="3045143"/>
+            <a:ext cx="2654260" cy="5641503"/>
           </a:xfrm>
         </p:spPr>
         <p:txBody>
@@ -2353,7 +2353,7 @@
           <a:p>
             <a:fld id="{56A34C3C-A36F-F249-809C-A0018531D0A6}" type="datetimeFigureOut">
               <a:rPr lang="en-US" smtClean="0"/>
-              <a:t>6/27/24</a:t>
+              <a:t>7/3/24</a:t>
             </a:fld>
             <a:endParaRPr lang="en-US"/>
           </a:p>
@@ -2404,7 +2404,7 @@
     </p:spTree>
     <p:extLst>
       <p:ext uri="{BB962C8B-B14F-4D97-AF65-F5344CB8AC3E}">
-        <p14:creationId xmlns:p14="http://schemas.microsoft.com/office/powerpoint/2010/main" val="2211629537"/>
+        <p14:creationId xmlns:p14="http://schemas.microsoft.com/office/powerpoint/2010/main" val="1357689939"/>
       </p:ext>
     </p:extLst>
   </p:cSld>
@@ -2448,8 +2448,8 @@
         </p:nvSpPr>
         <p:spPr>
           <a:xfrm>
-            <a:off x="565785" y="648437"/>
-            <a:ext cx="7098030" cy="2354102"/>
+            <a:off x="565785" y="540421"/>
+            <a:ext cx="7098030" cy="1961956"/>
           </a:xfrm>
           <a:prstGeom prst="rect">
             <a:avLst/>
@@ -2481,8 +2481,8 @@
         </p:nvSpPr>
         <p:spPr>
           <a:xfrm>
-            <a:off x="565785" y="3242175"/>
-            <a:ext cx="7098030" cy="7727654"/>
+            <a:off x="565785" y="2702094"/>
+            <a:ext cx="7098030" cy="6440383"/>
           </a:xfrm>
           <a:prstGeom prst="rect">
             <a:avLst/>
@@ -2543,8 +2543,8 @@
         </p:nvSpPr>
         <p:spPr>
           <a:xfrm>
-            <a:off x="565785" y="11288409"/>
-            <a:ext cx="1851660" cy="648435"/>
+            <a:off x="565785" y="9407989"/>
+            <a:ext cx="1851660" cy="540419"/>
           </a:xfrm>
           <a:prstGeom prst="rect">
             <a:avLst/>
@@ -2566,7 +2566,7 @@
           <a:p>
             <a:fld id="{56A34C3C-A36F-F249-809C-A0018531D0A6}" type="datetimeFigureOut">
               <a:rPr lang="en-US" smtClean="0"/>
-              <a:t>6/27/24</a:t>
+              <a:t>7/3/24</a:t>
             </a:fld>
             <a:endParaRPr lang="en-US"/>
           </a:p>
@@ -2584,8 +2584,8 @@
         </p:nvSpPr>
         <p:spPr>
           <a:xfrm>
-            <a:off x="2726055" y="11288409"/>
-            <a:ext cx="2777490" cy="648435"/>
+            <a:off x="2726055" y="9407989"/>
+            <a:ext cx="2777490" cy="540419"/>
           </a:xfrm>
           <a:prstGeom prst="rect">
             <a:avLst/>
@@ -2621,8 +2621,8 @@
         </p:nvSpPr>
         <p:spPr>
           <a:xfrm>
-            <a:off x="5812155" y="11288409"/>
-            <a:ext cx="1851660" cy="648435"/>
+            <a:off x="5812155" y="9407989"/>
+            <a:ext cx="1851660" cy="540419"/>
           </a:xfrm>
           <a:prstGeom prst="rect">
             <a:avLst/>
@@ -2653,23 +2653,23 @@
     </p:spTree>
     <p:extLst>
       <p:ext uri="{BB962C8B-B14F-4D97-AF65-F5344CB8AC3E}">
-        <p14:creationId xmlns:p14="http://schemas.microsoft.com/office/powerpoint/2010/main" val="2495887393"/>
+        <p14:creationId xmlns:p14="http://schemas.microsoft.com/office/powerpoint/2010/main" val="1020328265"/>
       </p:ext>
     </p:extLst>
   </p:cSld>
   <p:clrMap bg1="lt1" tx1="dk1" bg2="lt2" tx2="dk2" accent1="accent1" accent2="accent2" accent3="accent3" accent4="accent4" accent5="accent5" accent6="accent6" hlink="hlink" folHlink="folHlink"/>
   <p:sldLayoutIdLst>
-    <p:sldLayoutId id="2147483769" r:id="rId1"/>
-    <p:sldLayoutId id="2147483770" r:id="rId2"/>
-    <p:sldLayoutId id="2147483771" r:id="rId3"/>
-    <p:sldLayoutId id="2147483772" r:id="rId4"/>
-    <p:sldLayoutId id="2147483773" r:id="rId5"/>
-    <p:sldLayoutId id="2147483774" r:id="rId6"/>
-    <p:sldLayoutId id="2147483775" r:id="rId7"/>
-    <p:sldLayoutId id="2147483776" r:id="rId8"/>
-    <p:sldLayoutId id="2147483777" r:id="rId9"/>
-    <p:sldLayoutId id="2147483778" r:id="rId10"/>
-    <p:sldLayoutId id="2147483779" r:id="rId11"/>
+    <p:sldLayoutId id="2147483781" r:id="rId1"/>
+    <p:sldLayoutId id="2147483782" r:id="rId2"/>
+    <p:sldLayoutId id="2147483783" r:id="rId3"/>
+    <p:sldLayoutId id="2147483784" r:id="rId4"/>
+    <p:sldLayoutId id="2147483785" r:id="rId5"/>
+    <p:sldLayoutId id="2147483786" r:id="rId6"/>
+    <p:sldLayoutId id="2147483787" r:id="rId7"/>
+    <p:sldLayoutId id="2147483788" r:id="rId8"/>
+    <p:sldLayoutId id="2147483789" r:id="rId9"/>
+    <p:sldLayoutId id="2147483790" r:id="rId10"/>
+    <p:sldLayoutId id="2147483791" r:id="rId11"/>
   </p:sldLayoutIdLst>
   <p:txStyles>
     <p:titleStyle>
@@ -2973,10 +2973,10 @@
       </p:grpSpPr>
       <p:pic>
         <p:nvPicPr>
-          <p:cNvPr id="12" name="Picture 11">
+          <p:cNvPr id="3" name="Picture 2">
             <a:extLst>
               <a:ext uri="{FF2B5EF4-FFF2-40B4-BE49-F238E27FC236}">
-                <a16:creationId xmlns:a16="http://schemas.microsoft.com/office/drawing/2014/main" id="{A667DCA0-F5E4-FEAC-43C2-E479808131FE}"/>
+                <a16:creationId xmlns:a16="http://schemas.microsoft.com/office/drawing/2014/main" id="{A40CC693-1F87-D9A0-CFB9-1951B102BE7C}"/>
               </a:ext>
             </a:extLst>
           </p:cNvPr>
@@ -2993,8 +2993,8 @@
         </p:blipFill>
         <p:spPr>
           <a:xfrm>
-            <a:off x="457200" y="0"/>
-            <a:ext cx="7772400" cy="2032438"/>
+            <a:off x="457200" y="8118037"/>
+            <a:ext cx="7772400" cy="2032437"/>
           </a:xfrm>
           <a:prstGeom prst="rect">
             <a:avLst/>
@@ -3003,10 +3003,10 @@
       </p:pic>
       <p:pic>
         <p:nvPicPr>
-          <p:cNvPr id="16" name="Picture 15">
+          <p:cNvPr id="12" name="Picture 11">
             <a:extLst>
               <a:ext uri="{FF2B5EF4-FFF2-40B4-BE49-F238E27FC236}">
-                <a16:creationId xmlns:a16="http://schemas.microsoft.com/office/drawing/2014/main" id="{EC230FFB-9977-B519-C178-6B44A91FA23E}"/>
+                <a16:creationId xmlns:a16="http://schemas.microsoft.com/office/drawing/2014/main" id="{A667DCA0-F5E4-FEAC-43C2-E479808131FE}"/>
               </a:ext>
             </a:extLst>
           </p:cNvPr>
@@ -3023,7 +3023,7 @@
         </p:blipFill>
         <p:spPr>
           <a:xfrm>
-            <a:off x="457200" y="2017110"/>
+            <a:off x="457200" y="0"/>
             <a:ext cx="7772400" cy="2032438"/>
           </a:xfrm>
           <a:prstGeom prst="rect">
@@ -3053,7 +3053,7 @@
         </p:blipFill>
         <p:spPr>
           <a:xfrm>
-            <a:off x="457200" y="4049548"/>
+            <a:off x="457200" y="2032438"/>
             <a:ext cx="7772400" cy="2032438"/>
           </a:xfrm>
           <a:prstGeom prst="rect">
@@ -3083,7 +3083,7 @@
         </p:blipFill>
         <p:spPr>
           <a:xfrm>
-            <a:off x="457200" y="6066658"/>
+            <a:off x="457200" y="4049548"/>
             <a:ext cx="7772400" cy="2032438"/>
           </a:xfrm>
           <a:prstGeom prst="rect">
@@ -3113,7 +3113,7 @@
         </p:blipFill>
         <p:spPr>
           <a:xfrm>
-            <a:off x="457200" y="8106760"/>
+            <a:off x="457200" y="6089650"/>
             <a:ext cx="7772400" cy="2032438"/>
           </a:xfrm>
           <a:prstGeom prst="rect">
@@ -3121,42 +3121,12 @@
           </a:prstGeom>
         </p:spPr>
       </p:pic>
-      <p:pic>
-        <p:nvPicPr>
-          <p:cNvPr id="36" name="Picture 35">
+      <p:sp>
+        <p:nvSpPr>
+          <p:cNvPr id="38" name="Rectangle 37">
             <a:extLst>
               <a:ext uri="{FF2B5EF4-FFF2-40B4-BE49-F238E27FC236}">
-                <a16:creationId xmlns:a16="http://schemas.microsoft.com/office/drawing/2014/main" id="{2BAEE065-F3BF-59D3-6A73-5FEB62C46186}"/>
-              </a:ext>
-            </a:extLst>
-          </p:cNvPr>
-          <p:cNvPicPr>
-            <a:picLocks noChangeAspect="1"/>
-          </p:cNvPicPr>
-          <p:nvPr/>
-        </p:nvPicPr>
-        <p:blipFill>
-          <a:blip r:embed="rId7"/>
-          <a:stretch>
-            <a:fillRect/>
-          </a:stretch>
-        </p:blipFill>
-        <p:spPr>
-          <a:xfrm>
-            <a:off x="457200" y="10139198"/>
-            <a:ext cx="7772400" cy="2032438"/>
-          </a:xfrm>
-          <a:prstGeom prst="rect">
-            <a:avLst/>
-          </a:prstGeom>
-        </p:spPr>
-      </p:pic>
-      <p:sp>
-        <p:nvSpPr>
-          <p:cNvPr id="37" name="Rectangle 36">
-            <a:extLst>
-              <a:ext uri="{FF2B5EF4-FFF2-40B4-BE49-F238E27FC236}">
-                <a16:creationId xmlns:a16="http://schemas.microsoft.com/office/drawing/2014/main" id="{4F39691E-AE68-E32B-F87B-AE96F3467A65}"/>
+                <a16:creationId xmlns:a16="http://schemas.microsoft.com/office/drawing/2014/main" id="{51FAF800-FAD4-F8AE-C359-35599A9EDC3E}"/>
               </a:ext>
             </a:extLst>
           </p:cNvPr>
@@ -3165,7 +3135,7 @@
         </p:nvSpPr>
         <p:spPr>
           <a:xfrm>
-            <a:off x="935595" y="2198193"/>
+            <a:off x="935595" y="2522360"/>
             <a:ext cx="381504" cy="272504"/>
           </a:xfrm>
           <a:prstGeom prst="rect">
@@ -3207,10 +3177,10 @@
       </p:sp>
       <p:sp>
         <p:nvSpPr>
-          <p:cNvPr id="38" name="Rectangle 37">
+          <p:cNvPr id="39" name="Rectangle 38">
             <a:extLst>
               <a:ext uri="{FF2B5EF4-FFF2-40B4-BE49-F238E27FC236}">
-                <a16:creationId xmlns:a16="http://schemas.microsoft.com/office/drawing/2014/main" id="{51FAF800-FAD4-F8AE-C359-35599A9EDC3E}"/>
+                <a16:creationId xmlns:a16="http://schemas.microsoft.com/office/drawing/2014/main" id="{24CA59A7-20CC-0D9F-B70E-D8F4191FBD04}"/>
               </a:ext>
             </a:extLst>
           </p:cNvPr>
@@ -3219,7 +3189,7 @@
         </p:nvSpPr>
         <p:spPr>
           <a:xfrm>
-            <a:off x="935595" y="4539470"/>
+            <a:off x="935595" y="4231057"/>
             <a:ext cx="381504" cy="272504"/>
           </a:xfrm>
           <a:prstGeom prst="rect">
@@ -3261,10 +3231,10 @@
       </p:sp>
       <p:sp>
         <p:nvSpPr>
-          <p:cNvPr id="39" name="Rectangle 38">
+          <p:cNvPr id="40" name="Rectangle 39">
             <a:extLst>
               <a:ext uri="{FF2B5EF4-FFF2-40B4-BE49-F238E27FC236}">
-                <a16:creationId xmlns:a16="http://schemas.microsoft.com/office/drawing/2014/main" id="{24CA59A7-20CC-0D9F-B70E-D8F4191FBD04}"/>
+                <a16:creationId xmlns:a16="http://schemas.microsoft.com/office/drawing/2014/main" id="{D47B56B5-E5AA-9138-A837-1212C8911BAA}"/>
               </a:ext>
             </a:extLst>
           </p:cNvPr>
@@ -3273,7 +3243,7 @@
         </p:nvSpPr>
         <p:spPr>
           <a:xfrm>
-            <a:off x="935595" y="6248167"/>
+            <a:off x="935595" y="6259037"/>
             <a:ext cx="381504" cy="272504"/>
           </a:xfrm>
           <a:prstGeom prst="rect">
@@ -3315,10 +3285,10 @@
       </p:sp>
       <p:sp>
         <p:nvSpPr>
-          <p:cNvPr id="40" name="Rectangle 39">
+          <p:cNvPr id="42" name="Rectangle 41">
             <a:extLst>
               <a:ext uri="{FF2B5EF4-FFF2-40B4-BE49-F238E27FC236}">
-                <a16:creationId xmlns:a16="http://schemas.microsoft.com/office/drawing/2014/main" id="{D47B56B5-E5AA-9138-A837-1212C8911BAA}"/>
+                <a16:creationId xmlns:a16="http://schemas.microsoft.com/office/drawing/2014/main" id="{1E392E38-4D61-EB0E-41F6-AF8740AF8919}"/>
               </a:ext>
             </a:extLst>
           </p:cNvPr>
@@ -3327,7 +3297,7 @@
         </p:nvSpPr>
         <p:spPr>
           <a:xfrm>
-            <a:off x="935595" y="8276147"/>
+            <a:off x="935595" y="8291475"/>
             <a:ext cx="381504" cy="272504"/>
           </a:xfrm>
           <a:prstGeom prst="rect">
@@ -3369,320 +3339,43 @@
       </p:sp>
       <p:sp>
         <p:nvSpPr>
-          <p:cNvPr id="42" name="Rectangle 41">
+          <p:cNvPr id="43" name="TextBox 42">
             <a:extLst>
               <a:ext uri="{FF2B5EF4-FFF2-40B4-BE49-F238E27FC236}">
-                <a16:creationId xmlns:a16="http://schemas.microsoft.com/office/drawing/2014/main" id="{1E392E38-4D61-EB0E-41F6-AF8740AF8919}"/>
+                <a16:creationId xmlns:a16="http://schemas.microsoft.com/office/drawing/2014/main" id="{E88349D4-A088-D228-03D0-6E8395C5AF30}"/>
               </a:ext>
             </a:extLst>
           </p:cNvPr>
-          <p:cNvSpPr/>
+          <p:cNvSpPr txBox="1"/>
           <p:nvPr/>
         </p:nvSpPr>
         <p:spPr>
-          <a:xfrm>
-            <a:off x="935595" y="10308585"/>
-            <a:ext cx="381504" cy="272504"/>
+          <a:xfrm rot="16200000">
+            <a:off x="-823889" y="742244"/>
+            <a:ext cx="2017110" cy="369332"/>
           </a:xfrm>
           <a:prstGeom prst="rect">
             <a:avLst/>
           </a:prstGeom>
-          <a:solidFill>
-            <a:schemeClr val="bg1"/>
-          </a:solidFill>
-          <a:ln>
-            <a:solidFill>
-              <a:schemeClr val="bg1"/>
-            </a:solidFill>
-          </a:ln>
+          <a:noFill/>
         </p:spPr>
-        <p:style>
-          <a:lnRef idx="2">
-            <a:schemeClr val="accent1">
-              <a:shade val="15000"/>
-            </a:schemeClr>
-          </a:lnRef>
-          <a:fillRef idx="1">
-            <a:schemeClr val="accent1"/>
-          </a:fillRef>
-          <a:effectRef idx="0">
-            <a:schemeClr val="accent1"/>
-          </a:effectRef>
-          <a:fontRef idx="minor">
-            <a:schemeClr val="lt1"/>
-          </a:fontRef>
-        </p:style>
-        <p:txBody>
-          <a:bodyPr rtlCol="0" anchor="ctr"/>
+        <p:txBody>
+          <a:bodyPr wrap="square" rtlCol="0">
+            <a:spAutoFit/>
+          </a:bodyPr>
           <a:lstStyle/>
           <a:p>
             <a:pPr algn="ctr"/>
-            <a:endParaRPr lang="en-US"/>
-          </a:p>
-        </p:txBody>
-      </p:sp>
-      <mc:AlternateContent xmlns:mc="http://schemas.openxmlformats.org/markup-compatibility/2006">
-        <mc:Choice xmlns:a14="http://schemas.microsoft.com/office/drawing/2010/main" Requires="a14">
-          <p:sp>
-            <p:nvSpPr>
-              <p:cNvPr id="43" name="TextBox 42">
-                <a:extLst>
-                  <a:ext uri="{FF2B5EF4-FFF2-40B4-BE49-F238E27FC236}">
-                    <a16:creationId xmlns:a16="http://schemas.microsoft.com/office/drawing/2014/main" id="{E88349D4-A088-D228-03D0-6E8395C5AF30}"/>
-                  </a:ext>
-                </a:extLst>
-              </p:cNvPr>
-              <p:cNvSpPr txBox="1"/>
-              <p:nvPr/>
-            </p:nvSpPr>
-            <p:spPr>
-              <a:xfrm rot="16200000">
-                <a:off x="-823889" y="823889"/>
-                <a:ext cx="2017110" cy="369332"/>
-              </a:xfrm>
-              <a:prstGeom prst="rect">
-                <a:avLst/>
-              </a:prstGeom>
-              <a:noFill/>
-            </p:spPr>
-            <p:txBody>
-              <a:bodyPr wrap="square" rtlCol="0">
-                <a:spAutoFit/>
-              </a:bodyPr>
-              <a:lstStyle/>
-              <a:p>
-                <a:pPr algn="ctr"/>
-                <a:r>
-                  <a:rPr lang="en-US" b="1" dirty="0">
-                    <a:latin typeface="Arial" panose="020B0604020202020204" pitchFamily="34" charset="0"/>
-                    <a:cs typeface="Arial" panose="020B0604020202020204" pitchFamily="34" charset="0"/>
-                  </a:rPr>
-                  <a:t>aDDM </a:t>
-                </a:r>
-                <a14:m>
-                  <m:oMath xmlns:m="http://schemas.openxmlformats.org/officeDocument/2006/math">
-                    <m:r>
-                      <a:rPr lang="en-US" b="1" i="1" smtClean="0">
-                        <a:latin typeface="Cambria Math" panose="02040503050406030204" pitchFamily="18" charset="0"/>
-                      </a:rPr>
-                      <m:t>𝜽</m:t>
-                    </m:r>
-                    <m:r>
-                      <a:rPr lang="en-US" b="1" i="1" smtClean="0">
-                        <a:latin typeface="Cambria Math" panose="02040503050406030204" pitchFamily="18" charset="0"/>
-                      </a:rPr>
-                      <m:t>∈(</m:t>
-                    </m:r>
-                    <m:r>
-                      <a:rPr lang="en-US" b="1" i="1" smtClean="0">
-                        <a:latin typeface="Cambria Math" panose="02040503050406030204" pitchFamily="18" charset="0"/>
-                      </a:rPr>
-                      <m:t>𝟎</m:t>
-                    </m:r>
-                    <m:r>
-                      <a:rPr lang="en-US" b="1" i="1" smtClean="0">
-                        <a:latin typeface="Cambria Math" panose="02040503050406030204" pitchFamily="18" charset="0"/>
-                      </a:rPr>
-                      <m:t>,</m:t>
-                    </m:r>
-                    <m:r>
-                      <a:rPr lang="en-US" b="1" i="1" smtClean="0">
-                        <a:latin typeface="Cambria Math" panose="02040503050406030204" pitchFamily="18" charset="0"/>
-                      </a:rPr>
-                      <m:t>𝟏</m:t>
-                    </m:r>
-                    <m:r>
-                      <a:rPr lang="en-US" b="1" i="1" smtClean="0">
-                        <a:latin typeface="Cambria Math" panose="02040503050406030204" pitchFamily="18" charset="0"/>
-                      </a:rPr>
-                      <m:t>)</m:t>
-                    </m:r>
-                  </m:oMath>
-                </a14:m>
-                <a:endParaRPr lang="en-US" b="1" dirty="0">
-                  <a:latin typeface="Arial" panose="020B0604020202020204" pitchFamily="34" charset="0"/>
-                  <a:cs typeface="Arial" panose="020B0604020202020204" pitchFamily="34" charset="0"/>
-                </a:endParaRPr>
-              </a:p>
-            </p:txBody>
-          </p:sp>
-        </mc:Choice>
-        <mc:Fallback>
-          <p:sp>
-            <p:nvSpPr>
-              <p:cNvPr id="43" name="TextBox 42">
-                <a:extLst>
-                  <a:ext uri="{FF2B5EF4-FFF2-40B4-BE49-F238E27FC236}">
-                    <a16:creationId xmlns:a16="http://schemas.microsoft.com/office/drawing/2014/main" id="{E88349D4-A088-D228-03D0-6E8395C5AF30}"/>
-                  </a:ext>
-                </a:extLst>
-              </p:cNvPr>
-              <p:cNvSpPr txBox="1">
-                <a:spLocks noRot="1" noChangeAspect="1" noMove="1" noResize="1" noEditPoints="1" noAdjustHandles="1" noChangeArrowheads="1" noChangeShapeType="1" noTextEdit="1"/>
-              </p:cNvSpPr>
-              <p:nvPr/>
-            </p:nvSpPr>
-            <p:spPr>
-              <a:xfrm rot="16200000">
-                <a:off x="-823889" y="823889"/>
-                <a:ext cx="2017110" cy="369332"/>
-              </a:xfrm>
-              <a:prstGeom prst="rect">
-                <a:avLst/>
-              </a:prstGeom>
-              <a:blipFill>
-                <a:blip r:embed="rId8"/>
-                <a:stretch>
-                  <a:fillRect l="-6667" r="-23333"/>
-                </a:stretch>
-              </a:blipFill>
-            </p:spPr>
-            <p:txBody>
-              <a:bodyPr/>
-              <a:lstStyle/>
-              <a:p>
-                <a:r>
-                  <a:rPr lang="en-US">
-                    <a:noFill/>
-                  </a:rPr>
-                  <a:t> </a:t>
-                </a:r>
-              </a:p>
-            </p:txBody>
-          </p:sp>
-        </mc:Fallback>
-      </mc:AlternateContent>
-      <mc:AlternateContent xmlns:mc="http://schemas.openxmlformats.org/markup-compatibility/2006">
-        <mc:Choice xmlns:a14="http://schemas.microsoft.com/office/drawing/2010/main" Requires="a14">
-          <p:sp>
-            <p:nvSpPr>
-              <p:cNvPr id="45" name="TextBox 44">
-                <a:extLst>
-                  <a:ext uri="{FF2B5EF4-FFF2-40B4-BE49-F238E27FC236}">
-                    <a16:creationId xmlns:a16="http://schemas.microsoft.com/office/drawing/2014/main" id="{A8D769B5-5D75-CE91-7999-258FC49A6EB6}"/>
-                  </a:ext>
-                </a:extLst>
-              </p:cNvPr>
-              <p:cNvSpPr txBox="1"/>
-              <p:nvPr/>
-            </p:nvSpPr>
-            <p:spPr>
-              <a:xfrm rot="16200000">
-                <a:off x="-823889" y="2856327"/>
-                <a:ext cx="2017110" cy="369332"/>
-              </a:xfrm>
-              <a:prstGeom prst="rect">
-                <a:avLst/>
-              </a:prstGeom>
-              <a:noFill/>
-            </p:spPr>
-            <p:txBody>
-              <a:bodyPr wrap="square" rtlCol="0">
-                <a:spAutoFit/>
-              </a:bodyPr>
-              <a:lstStyle/>
-              <a:p>
-                <a:pPr algn="ctr"/>
-                <a:r>
-                  <a:rPr lang="en-US" b="1" dirty="0">
-                    <a:latin typeface="Arial" panose="020B0604020202020204" pitchFamily="34" charset="0"/>
-                    <a:cs typeface="Arial" panose="020B0604020202020204" pitchFamily="34" charset="0"/>
-                  </a:rPr>
-                  <a:t>aDDM </a:t>
-                </a:r>
-                <a14:m>
-                  <m:oMath xmlns:m="http://schemas.openxmlformats.org/officeDocument/2006/math">
-                    <m:r>
-                      <a:rPr lang="en-US" b="1" i="1" smtClean="0">
-                        <a:latin typeface="Cambria Math" panose="02040503050406030204" pitchFamily="18" charset="0"/>
-                      </a:rPr>
-                      <m:t>𝜽</m:t>
-                    </m:r>
-                    <m:r>
-                      <a:rPr lang="en-US" b="1" i="1" smtClean="0">
-                        <a:latin typeface="Cambria Math" panose="02040503050406030204" pitchFamily="18" charset="0"/>
-                      </a:rPr>
-                      <m:t>∈(</m:t>
-                    </m:r>
-                    <m:r>
-                      <a:rPr lang="en-US" b="1" i="1" smtClean="0">
-                        <a:latin typeface="Cambria Math" panose="02040503050406030204" pitchFamily="18" charset="0"/>
-                      </a:rPr>
-                      <m:t>𝟎</m:t>
-                    </m:r>
-                    <m:r>
-                      <a:rPr lang="en-US" b="1" i="1" smtClean="0">
-                        <a:latin typeface="Cambria Math" panose="02040503050406030204" pitchFamily="18" charset="0"/>
-                      </a:rPr>
-                      <m:t>,</m:t>
-                    </m:r>
-                    <m:r>
-                      <a:rPr lang="en-US" b="1" i="1" smtClean="0">
-                        <a:latin typeface="Cambria Math" panose="02040503050406030204" pitchFamily="18" charset="0"/>
-                      </a:rPr>
-                      <m:t>𝟐</m:t>
-                    </m:r>
-                    <m:r>
-                      <a:rPr lang="en-US" b="1" i="1" smtClean="0">
-                        <a:latin typeface="Cambria Math" panose="02040503050406030204" pitchFamily="18" charset="0"/>
-                      </a:rPr>
-                      <m:t>)</m:t>
-                    </m:r>
-                  </m:oMath>
-                </a14:m>
-                <a:endParaRPr lang="en-US" b="1" dirty="0">
-                  <a:latin typeface="Arial" panose="020B0604020202020204" pitchFamily="34" charset="0"/>
-                  <a:cs typeface="Arial" panose="020B0604020202020204" pitchFamily="34" charset="0"/>
-                </a:endParaRPr>
-              </a:p>
-            </p:txBody>
-          </p:sp>
-        </mc:Choice>
-        <mc:Fallback>
-          <p:sp>
-            <p:nvSpPr>
-              <p:cNvPr id="45" name="TextBox 44">
-                <a:extLst>
-                  <a:ext uri="{FF2B5EF4-FFF2-40B4-BE49-F238E27FC236}">
-                    <a16:creationId xmlns:a16="http://schemas.microsoft.com/office/drawing/2014/main" id="{A8D769B5-5D75-CE91-7999-258FC49A6EB6}"/>
-                  </a:ext>
-                </a:extLst>
-              </p:cNvPr>
-              <p:cNvSpPr txBox="1">
-                <a:spLocks noRot="1" noChangeAspect="1" noMove="1" noResize="1" noEditPoints="1" noAdjustHandles="1" noChangeArrowheads="1" noChangeShapeType="1" noTextEdit="1"/>
-              </p:cNvSpPr>
-              <p:nvPr/>
-            </p:nvSpPr>
-            <p:spPr>
-              <a:xfrm rot="16200000">
-                <a:off x="-823889" y="2856327"/>
-                <a:ext cx="2017110" cy="369332"/>
-              </a:xfrm>
-              <a:prstGeom prst="rect">
-                <a:avLst/>
-              </a:prstGeom>
-              <a:blipFill>
-                <a:blip r:embed="rId9"/>
-                <a:stretch>
-                  <a:fillRect l="-6667" r="-23333"/>
-                </a:stretch>
-              </a:blipFill>
-            </p:spPr>
-            <p:txBody>
-              <a:bodyPr/>
-              <a:lstStyle/>
-              <a:p>
-                <a:r>
-                  <a:rPr lang="en-US">
-                    <a:noFill/>
-                  </a:rPr>
-                  <a:t> </a:t>
-                </a:r>
-              </a:p>
-            </p:txBody>
-          </p:sp>
-        </mc:Fallback>
-      </mc:AlternateContent>
+            <a:r>
+              <a:rPr lang="en-US" b="1" dirty="0">
+                <a:latin typeface="Arial" panose="020B0604020202020204" pitchFamily="34" charset="0"/>
+                <a:cs typeface="Arial" panose="020B0604020202020204" pitchFamily="34" charset="0"/>
+              </a:rPr>
+              <a:t>aDDM</a:t>
+            </a:r>
+          </a:p>
+        </p:txBody>
+      </p:sp>
       <p:sp>
         <p:nvSpPr>
           <p:cNvPr id="46" name="TextBox 45">
@@ -3697,7 +3390,7 @@
         </p:nvSpPr>
         <p:spPr>
           <a:xfrm rot="16200000">
-            <a:off x="-823889" y="4873437"/>
+            <a:off x="-823889" y="2774682"/>
             <a:ext cx="2017110" cy="369332"/>
           </a:xfrm>
           <a:prstGeom prst="rect">
@@ -3740,7 +3433,7 @@
         </p:nvSpPr>
         <p:spPr>
           <a:xfrm rot="16200000">
-            <a:off x="-823889" y="6913539"/>
+            <a:off x="-823889" y="4814784"/>
             <a:ext cx="2017110" cy="369332"/>
           </a:xfrm>
           <a:prstGeom prst="rect">
@@ -3783,7 +3476,7 @@
         </p:nvSpPr>
         <p:spPr>
           <a:xfrm rot="16200000">
-            <a:off x="-823889" y="8938313"/>
+            <a:off x="-823889" y="6839558"/>
             <a:ext cx="2017110" cy="369332"/>
           </a:xfrm>
           <a:prstGeom prst="rect">
@@ -3826,7 +3519,7 @@
         </p:nvSpPr>
         <p:spPr>
           <a:xfrm rot="16200000">
-            <a:off x="-823889" y="10963087"/>
+            <a:off x="-823889" y="8864332"/>
             <a:ext cx="2017110" cy="369332"/>
           </a:xfrm>
           <a:prstGeom prst="rect">
